--- a/classes/parte-10-seguridad-en-la-nube-y-contenedores/234-logging-y-deteccion-en-la-nube/clase-234-presentacion.pptx
+++ b/classes/parte-10-seguridad-en-la-nube-y-contenedores/234-logging-y-deteccion-en-la-nube/clase-234-presentacion.pptx
@@ -17,6 +17,10 @@
     <p:sldId id="265" r:id="rId16"/>
     <p:sldId id="266" r:id="rId17"/>
     <p:sldId id="267" r:id="rId18"/>
+    <p:sldId id="268" r:id="rId19"/>
+    <p:sldId id="269" r:id="rId20"/>
+    <p:sldId id="270" r:id="rId21"/>
+    <p:sldId id="271" r:id="rId22"/>
   </p:sldIdLst>
   <p:sldSz cx="9144000" cy="6858000" type="screen4x3"/>
   <p:notesSz cx="6858000" cy="9144000"/>
@@ -3198,7 +3202,7 @@
                   <a:srgbClr val="0B3D2E"/>
                 </a:solidFill>
               </a:rPr>
-              <a:t>⚠️ Errores comunes</a:t>
+              <a:t>🧪 Laboratorio guiado</a:t>
             </a:r>
           </a:p>
         </p:txBody>
@@ -3236,67 +3240,97 @@
                   <a:srgbClr val="22282E"/>
                 </a:solidFill>
               </a:rPr>
-              <a:t>•  No hay logs de una región — CloudTrail no multi-región; actívalo globalmente.</a:t>
-            </a:r>
-          </a:p>
-          <a:p>
-            <a:pPr>
-              <a:spcAft>
-                <a:spcPts val="600"/>
-              </a:spcAft>
-            </a:pPr>
-            <a:r>
-              <a:rPr sz="1500">
-                <a:solidFill>
-                  <a:srgbClr val="22282E"/>
-                </a:solidFill>
-              </a:rPr>
-              <a:t>•  Atacante borró los logs — Bucket sin inmutabilidad; aplica object lock y cuenta de logging separada.</a:t>
-            </a:r>
-          </a:p>
-          <a:p>
-            <a:pPr>
-              <a:spcAft>
-                <a:spcPts val="600"/>
-              </a:spcAft>
-            </a:pPr>
-            <a:r>
-              <a:rPr sz="1500">
-                <a:solidFill>
-                  <a:srgbClr val="22282E"/>
-                </a:solidFill>
-              </a:rPr>
-              <a:t>•  Alertas por todo (ruido) — Reglas sin afinar; ajusta umbrales y usa listas de excepción justificadas.</a:t>
-            </a:r>
-          </a:p>
-          <a:p>
-            <a:pPr>
-              <a:spcAft>
-                <a:spcPts val="600"/>
-              </a:spcAft>
-            </a:pPr>
-            <a:r>
-              <a:rPr sz="1500">
-                <a:solidFill>
-                  <a:srgbClr val="22282E"/>
-                </a:solidFill>
-              </a:rPr>
-              <a:t>•  No se registran accesos a datos — Data events desactivados por coste; actívalos en buckets críticos.</a:t>
-            </a:r>
-          </a:p>
-          <a:p>
-            <a:pPr>
-              <a:spcAft>
-                <a:spcPts val="600"/>
-              </a:spcAft>
-            </a:pPr>
-            <a:r>
-              <a:rPr sz="1500">
-                <a:solidFill>
-                  <a:srgbClr val="22282E"/>
-                </a:solidFill>
-              </a:rPr>
-              <a:t>•  Alertas llegan tarde — Latencia de entrega/consulta; usa entrega casi en tiempo real y consultas eficientes.</a:t>
+              <a:t>•  Verifica que el logging del plano de gestión está activo multi-región y que su bucket/almacén es inmutable (object lock / retención).</a:t>
+            </a:r>
+          </a:p>
+          <a:p>
+            <a:pPr>
+              <a:spcAft>
+                <a:spcPts val="600"/>
+              </a:spcAft>
+            </a:pPr>
+            <a:r>
+              <a:rPr sz="1500">
+                <a:solidFill>
+                  <a:srgbClr val="22282E"/>
+                </a:solidFill>
+              </a:rPr>
+              <a:t>•  Genera actividad en tu cuenta de laboratorio (crea una clave de acceso, abre un security group, sube un objeto) para producir eventos.</a:t>
+            </a:r>
+          </a:p>
+          <a:p>
+            <a:pPr>
+              <a:spcAft>
+                <a:spcPts val="600"/>
+              </a:spcAft>
+            </a:pPr>
+            <a:r>
+              <a:rPr sz="1500">
+                <a:solidFill>
+                  <a:srgbClr val="22282E"/>
+                </a:solidFill>
+              </a:rPr>
+              <a:t>•  Escribe consultas para detectar: (a) creación de claves de acceso IAM, (b) intento de deshabilitar CloudTrail/logging, (c) PutBucketPolicy que abre un bucket.</a:t>
+            </a:r>
+          </a:p>
+          <a:p>
+            <a:pPr>
+              <a:spcAft>
+                <a:spcPts val="600"/>
+              </a:spcAft>
+            </a:pPr>
+            <a:r>
+              <a:rPr sz="1500">
+                <a:solidFill>
+                  <a:srgbClr val="22282E"/>
+                </a:solidFill>
+              </a:rPr>
+              <a:t>•  Traduce esas detecciones a reglas Sigma y mapéalas a técnicas de MITRE ATT&amp;CK for Cloud (Defense Evasion: Impair Defenses; Persistence: Create Account/Access Key).</a:t>
+            </a:r>
+          </a:p>
+          <a:p>
+            <a:pPr>
+              <a:spcAft>
+                <a:spcPts val="600"/>
+              </a:spcAft>
+            </a:pPr>
+            <a:r>
+              <a:rPr sz="1500">
+                <a:solidFill>
+                  <a:srgbClr val="22282E"/>
+                </a:solidFill>
+              </a:rPr>
+              <a:t>•  Integra los logs en un SIEM (Sentinel/Security Lake/Chronicle) y crea una alerta que dispare al deshabilitar el logging.</a:t>
+            </a:r>
+          </a:p>
+          <a:p>
+            <a:pPr>
+              <a:spcAft>
+                <a:spcPts val="600"/>
+              </a:spcAft>
+            </a:pPr>
+            <a:r>
+              <a:rPr sz="1500">
+                <a:solidFill>
+                  <a:srgbClr val="22282E"/>
+                </a:solidFill>
+              </a:rPr>
+              <a:t>•  Simula un punto ciego: crea un recurso en una región sin logging y comprueba que no aparece; corrige activando cobertura global.</a:t>
+            </a:r>
+          </a:p>
+          <a:p>
+            <a:pPr>
+              <a:spcAft>
+                <a:spcPts val="600"/>
+              </a:spcAft>
+            </a:pPr>
+            <a:r>
+              <a:rPr sz="1500">
+                <a:solidFill>
+                  <a:srgbClr val="22282E"/>
+                </a:solidFill>
+              </a:rPr>
+              <a:t>•  Documenta la latencia entre la acción y la alerta, y ajusta la retención según requisitos de cumplimiento.</a:t>
             </a:r>
           </a:p>
         </p:txBody>
@@ -3347,7 +3381,7 @@
                   <a:srgbClr val="0B3D2E"/>
                 </a:solidFill>
               </a:rPr>
-              <a:t>❓ Preguntas frecuentes</a:t>
+              <a:t>✍️ Ejercicios</a:t>
             </a:r>
           </a:p>
         </p:txBody>
@@ -3385,82 +3419,82 @@
                   <a:srgbClr val="22282E"/>
                 </a:solidFill>
               </a:rPr>
-              <a:t>•  ❓ ¿Qué log activo primero si solo puedo activar uno?</a:t>
-            </a:r>
-          </a:p>
-          <a:p>
-            <a:pPr>
-              <a:spcAft>
-                <a:spcPts val="600"/>
-              </a:spcAft>
-            </a:pPr>
-            <a:r>
-              <a:rPr sz="1500">
-                <a:solidFill>
-                  <a:srgbClr val="22282E"/>
-                </a:solidFill>
-              </a:rPr>
-              <a:t>•  El del plano de gestión (CloudTrail / Activity Log / Cloud Audit Logs). Registra el "quién hizo qué" a nivel de API y es la fuente más valiosa tanto para detección como para forense.</a:t>
-            </a:r>
-          </a:p>
-          <a:p>
-            <a:pPr>
-              <a:spcAft>
-                <a:spcPts val="600"/>
-              </a:spcAft>
-            </a:pPr>
-            <a:r>
-              <a:rPr sz="1500">
-                <a:solidFill>
-                  <a:srgbClr val="22282E"/>
-                </a:solidFill>
-              </a:rPr>
-              <a:t>•  ❓ ¿Por qué guardar los logs en una cuenta separada e inmutable?</a:t>
-            </a:r>
-          </a:p>
-          <a:p>
-            <a:pPr>
-              <a:spcAft>
-                <a:spcPts val="600"/>
-              </a:spcAft>
-            </a:pPr>
-            <a:r>
-              <a:rPr sz="1500">
-                <a:solidFill>
-                  <a:srgbClr val="22282E"/>
-                </a:solidFill>
-              </a:rPr>
-              <a:t>•  Porque un atacante con acceso a la cuenta intentará borrar los rastros. Enviar los logs a una cuenta de logging aparte, append-only y con retención, preserva la evidencia aunque la cuenta original se comprometa.</a:t>
-            </a:r>
-          </a:p>
-          <a:p>
-            <a:pPr>
-              <a:spcAft>
-                <a:spcPts val="600"/>
-              </a:spcAft>
-            </a:pPr>
-            <a:r>
-              <a:rPr sz="1500">
-                <a:solidFill>
-                  <a:srgbClr val="22282E"/>
-                </a:solidFill>
-              </a:rPr>
-              <a:t>•  ❓ ¿Los data events valen la pena si cuestan más?</a:t>
-            </a:r>
-          </a:p>
-          <a:p>
-            <a:pPr>
-              <a:spcAft>
-                <a:spcPts val="600"/>
-              </a:spcAft>
-            </a:pPr>
-            <a:r>
-              <a:rPr sz="1500">
-                <a:solidFill>
-                  <a:srgbClr val="22282E"/>
-                </a:solidFill>
-              </a:rPr>
-              <a:t>•  En recursos críticos (buckets con datos sensibles) sí: son la única forma de detectar exfiltración de datos a nivel de objeto. Actívalos selectivamente donde el riesgo lo justifique, no en todo.</a:t>
+              <a:t>•  Escribe una regla que alerte cuando se deshabilita el logging del plano de gestión.</a:t>
+            </a:r>
+          </a:p>
+          <a:p>
+            <a:pPr>
+              <a:spcAft>
+                <a:spcPts val="600"/>
+              </a:spcAft>
+            </a:pPr>
+            <a:r>
+              <a:rPr sz="1500">
+                <a:solidFill>
+                  <a:srgbClr val="22282E"/>
+                </a:solidFill>
+              </a:rPr>
+              <a:t>•  Detecta un pico anómalo de GetObject (posible exfiltración) usando data events.</a:t>
+            </a:r>
+          </a:p>
+          <a:p>
+            <a:pPr>
+              <a:spcAft>
+                <a:spcPts val="600"/>
+              </a:spcAft>
+            </a:pPr>
+            <a:r>
+              <a:rPr sz="1500">
+                <a:solidFill>
+                  <a:srgbClr val="22282E"/>
+                </a:solidFill>
+              </a:rPr>
+              <a:t>•  Crea una regla Sigma para el uso de credenciales desde una geolocalización inusual.</a:t>
+            </a:r>
+          </a:p>
+          <a:p>
+            <a:pPr>
+              <a:spcAft>
+                <a:spcPts val="600"/>
+              </a:spcAft>
+            </a:pPr>
+            <a:r>
+              <a:rPr sz="1500">
+                <a:solidFill>
+                  <a:srgbClr val="22282E"/>
+                </a:solidFill>
+              </a:rPr>
+              <a:t>•  Diseña un esquema de centralización de logs multi-cuenta inmutable.</a:t>
+            </a:r>
+          </a:p>
+          <a:p>
+            <a:pPr>
+              <a:spcAft>
+                <a:spcPts val="600"/>
+              </a:spcAft>
+            </a:pPr>
+            <a:r>
+              <a:rPr sz="1500">
+                <a:solidFill>
+                  <a:srgbClr val="22282E"/>
+                </a:solidFill>
+              </a:rPr>
+              <a:t>•  Consulta Flow Logs para identificar una conexión saliente sospechosa.</a:t>
+            </a:r>
+          </a:p>
+          <a:p>
+            <a:pPr>
+              <a:spcAft>
+                <a:spcPts val="600"/>
+              </a:spcAft>
+            </a:pPr>
+            <a:r>
+              <a:rPr sz="1500">
+                <a:solidFill>
+                  <a:srgbClr val="22282E"/>
+                </a:solidFill>
+              </a:rPr>
+              <a:t>•  Define la política de retención de logs para un requisito de 1 año.</a:t>
             </a:r>
           </a:p>
         </p:txBody>
@@ -3511,7 +3545,7 @@
                   <a:srgbClr val="0B3D2E"/>
                 </a:solidFill>
               </a:rPr>
-              <a:t>🔗 Referencias</a:t>
+              <a:t>📝 Reto verificable</a:t>
             </a:r>
           </a:p>
         </p:txBody>
@@ -3549,71 +3583,608 @@
                   <a:srgbClr val="22282E"/>
                 </a:solidFill>
               </a:rPr>
-              <a:t>•  AWS CloudTrail docs. &lt;https://docs.aws.amazon.com/awscloudtrail/latest/userguide/&gt;</a:t>
-            </a:r>
-          </a:p>
-          <a:p>
-            <a:pPr>
-              <a:spcAft>
-                <a:spcPts val="600"/>
-              </a:spcAft>
-            </a:pPr>
-            <a:r>
-              <a:rPr sz="1500">
-                <a:solidFill>
-                  <a:srgbClr val="22282E"/>
-                </a:solidFill>
-              </a:rPr>
-              <a:t>•  MITRE ATT&amp;CK — Cloud (Impair Defenses, Exfiltration). &lt;https://attack.mitre.org/matrices/enterprise/cloud/&gt;</a:t>
-            </a:r>
-          </a:p>
-          <a:p>
-            <a:pPr>
-              <a:spcAft>
-                <a:spcPts val="600"/>
-              </a:spcAft>
-            </a:pPr>
-            <a:r>
-              <a:rPr sz="1500">
-                <a:solidFill>
-                  <a:srgbClr val="22282E"/>
-                </a:solidFill>
-              </a:rPr>
-              <a:t>•  Azure Monitor &amp; Activity Log. &lt;https://learn.microsoft.com/azure/azure-monitor/&gt;</a:t>
-            </a:r>
-          </a:p>
-          <a:p>
-            <a:pPr>
-              <a:spcAft>
-                <a:spcPts val="600"/>
-              </a:spcAft>
-            </a:pPr>
-            <a:r>
-              <a:rPr sz="1500">
-                <a:solidFill>
-                  <a:srgbClr val="22282E"/>
-                </a:solidFill>
-              </a:rPr>
-              <a:t>•  Google Cloud Audit Logs. &lt;https://cloud.google.com/logging/docs/audit&gt;</a:t>
-            </a:r>
-          </a:p>
-          <a:p>
-            <a:pPr>
-              <a:spcAft>
-                <a:spcPts val="600"/>
-              </a:spcAft>
-            </a:pPr>
-            <a:r>
-              <a:rPr sz="1500">
-                <a:solidFill>
-                  <a:srgbClr val="22282E"/>
-                </a:solidFill>
-              </a:rPr>
-              <a:t>•  Sigma — Generic signature format. &lt;https://github.com/SigmaHQ/sigma&gt;</a:t>
-            </a:r>
-          </a:p>
-        </p:txBody>
-      </p:sp>
+              <a:t>•  Configura la capa de visibilidad de una cuenta de laboratorio y demuestra una detección de extremo a</a:t>
+            </a:r>
+          </a:p>
+          <a:p>
+            <a:pPr>
+              <a:spcAft>
+                <a:spcPts val="600"/>
+              </a:spcAft>
+            </a:pPr>
+            <a:r>
+              <a:rPr sz="1500">
+                <a:solidFill>
+                  <a:srgbClr val="22282E"/>
+                </a:solidFill>
+              </a:rPr>
+              <a:t>•  extremo: una acción maliciosa simulada genera un evento que dispara una alerta en el SIEM.</a:t>
+            </a:r>
+          </a:p>
+          <a:p>
+            <a:pPr>
+              <a:spcAft>
+                <a:spcPts val="600"/>
+              </a:spcAft>
+            </a:pPr>
+            <a:r>
+              <a:rPr sz="1500">
+                <a:solidFill>
+                  <a:srgbClr val="22282E"/>
+                </a:solidFill>
+              </a:rPr>
+              <a:t>•  Criterio de aceptación: el logging del plano de gestión está activo multi-región y en almacén</a:t>
+            </a:r>
+          </a:p>
+          <a:p>
+            <a:pPr>
+              <a:spcAft>
+                <a:spcPts val="600"/>
+              </a:spcAft>
+            </a:pPr>
+            <a:r>
+              <a:rPr sz="1500">
+                <a:solidFill>
+                  <a:srgbClr val="22282E"/>
+                </a:solidFill>
+              </a:rPr>
+              <a:t>•  inmutable; al ejecutar la acción simulada (p. ej. crear una clave de acceso o intentar deshabilitar el</a:t>
+            </a:r>
+          </a:p>
+          <a:p>
+            <a:pPr>
+              <a:spcAft>
+                <a:spcPts val="600"/>
+              </a:spcAft>
+            </a:pPr>
+            <a:r>
+              <a:rPr sz="1500">
+                <a:solidFill>
+                  <a:srgbClr val="22282E"/>
+                </a:solidFill>
+              </a:rPr>
+              <a:t>•  logging) se genera una alerta trazable en el SIEM, con la técnica ATT&amp;CK asociada documentada.</a:t>
+            </a:r>
+          </a:p>
+        </p:txBody>
+      </p:sp>
+    </p:spTree>
+  </p:cSld>
+  <p:clrMapOvr>
+    <a:masterClrMapping/>
+  </p:clrMapOvr>
+</p:sld>
+</file>
+
+<file path=ppt/slides/slide13.xml><?xml version="1.0" encoding="utf-8"?>
+<p:sld xmlns:a="http://schemas.openxmlformats.org/drawingml/2006/main" xmlns:p="http://schemas.openxmlformats.org/presentationml/2006/main" xmlns:r="http://schemas.openxmlformats.org/officeDocument/2006/relationships">
+  <p:cSld>
+    <p:spTree>
+      <p:nvGrpSpPr>
+        <p:cNvPr id="1" name=""/>
+        <p:cNvGrpSpPr/>
+        <p:nvPr/>
+      </p:nvGrpSpPr>
+      <p:grpSpPr/>
+      <p:sp>
+        <p:nvSpPr>
+          <p:cNvPr id="2" name="TextBox 1"/>
+          <p:cNvSpPr txBox="1"/>
+          <p:nvPr/>
+        </p:nvSpPr>
+        <p:spPr>
+          <a:xfrm>
+            <a:off x="457200" y="320040"/>
+            <a:ext cx="8229600" cy="822960"/>
+          </a:xfrm>
+          <a:prstGeom prst="rect">
+            <a:avLst/>
+          </a:prstGeom>
+          <a:noFill/>
+        </p:spPr>
+        <p:txBody>
+          <a:bodyPr wrap="square">
+            <a:spAutoFit/>
+          </a:bodyPr>
+          <a:lstStyle/>
+          <a:p>
+            <a:r>
+              <a:rPr sz="2600" b="1">
+                <a:solidFill>
+                  <a:srgbClr val="0B3D2E"/>
+                </a:solidFill>
+              </a:rPr>
+              <a:t>⚠️ Errores comunes</a:t>
+            </a:r>
+          </a:p>
+        </p:txBody>
+      </p:sp>
+      <p:sp>
+        <p:nvSpPr>
+          <p:cNvPr id="3" name="TextBox 2"/>
+          <p:cNvSpPr txBox="1"/>
+          <p:nvPr/>
+        </p:nvSpPr>
+        <p:spPr>
+          <a:xfrm>
+            <a:off x="457200" y="1280160"/>
+            <a:ext cx="8229600" cy="4937760"/>
+          </a:xfrm>
+          <a:prstGeom prst="rect">
+            <a:avLst/>
+          </a:prstGeom>
+          <a:noFill/>
+        </p:spPr>
+        <p:txBody>
+          <a:bodyPr wrap="square">
+            <a:spAutoFit/>
+          </a:bodyPr>
+          <a:lstStyle/>
+          <a:p>
+            <a:pPr>
+              <a:spcAft>
+                <a:spcPts val="600"/>
+              </a:spcAft>
+            </a:pPr>
+            <a:r>
+              <a:rPr sz="1500">
+                <a:solidFill>
+                  <a:srgbClr val="22282E"/>
+                </a:solidFill>
+              </a:rPr>
+              <a:t>•  No hay logs de una región — CloudTrail no multi-región; actívalo globalmente.</a:t>
+            </a:r>
+          </a:p>
+          <a:p>
+            <a:pPr>
+              <a:spcAft>
+                <a:spcPts val="600"/>
+              </a:spcAft>
+            </a:pPr>
+            <a:r>
+              <a:rPr sz="1500">
+                <a:solidFill>
+                  <a:srgbClr val="22282E"/>
+                </a:solidFill>
+              </a:rPr>
+              <a:t>•  Atacante borró los logs — Bucket sin inmutabilidad; aplica object lock y cuenta de logging separada.</a:t>
+            </a:r>
+          </a:p>
+          <a:p>
+            <a:pPr>
+              <a:spcAft>
+                <a:spcPts val="600"/>
+              </a:spcAft>
+            </a:pPr>
+            <a:r>
+              <a:rPr sz="1500">
+                <a:solidFill>
+                  <a:srgbClr val="22282E"/>
+                </a:solidFill>
+              </a:rPr>
+              <a:t>•  Alertas por todo (ruido) — Reglas sin afinar; ajusta umbrales y usa listas de excepción justificadas.</a:t>
+            </a:r>
+          </a:p>
+          <a:p>
+            <a:pPr>
+              <a:spcAft>
+                <a:spcPts val="600"/>
+              </a:spcAft>
+            </a:pPr>
+            <a:r>
+              <a:rPr sz="1500">
+                <a:solidFill>
+                  <a:srgbClr val="22282E"/>
+                </a:solidFill>
+              </a:rPr>
+              <a:t>•  No se registran accesos a datos — Data events desactivados por coste; actívalos en buckets críticos.</a:t>
+            </a:r>
+          </a:p>
+          <a:p>
+            <a:pPr>
+              <a:spcAft>
+                <a:spcPts val="600"/>
+              </a:spcAft>
+            </a:pPr>
+            <a:r>
+              <a:rPr sz="1500">
+                <a:solidFill>
+                  <a:srgbClr val="22282E"/>
+                </a:solidFill>
+              </a:rPr>
+              <a:t>•  Alertas llegan tarde — Latencia de entrega/consulta; usa entrega casi en tiempo real y consultas eficientes.</a:t>
+            </a:r>
+          </a:p>
+        </p:txBody>
+      </p:sp>
+    </p:spTree>
+  </p:cSld>
+  <p:clrMapOvr>
+    <a:masterClrMapping/>
+  </p:clrMapOvr>
+</p:sld>
+</file>
+
+<file path=ppt/slides/slide14.xml><?xml version="1.0" encoding="utf-8"?>
+<p:sld xmlns:a="http://schemas.openxmlformats.org/drawingml/2006/main" xmlns:p="http://schemas.openxmlformats.org/presentationml/2006/main" xmlns:r="http://schemas.openxmlformats.org/officeDocument/2006/relationships">
+  <p:cSld>
+    <p:spTree>
+      <p:nvGrpSpPr>
+        <p:cNvPr id="1" name=""/>
+        <p:cNvGrpSpPr/>
+        <p:nvPr/>
+      </p:nvGrpSpPr>
+      <p:grpSpPr/>
+      <p:sp>
+        <p:nvSpPr>
+          <p:cNvPr id="2" name="TextBox 1"/>
+          <p:cNvSpPr txBox="1"/>
+          <p:nvPr/>
+        </p:nvSpPr>
+        <p:spPr>
+          <a:xfrm>
+            <a:off x="457200" y="320040"/>
+            <a:ext cx="8229600" cy="822960"/>
+          </a:xfrm>
+          <a:prstGeom prst="rect">
+            <a:avLst/>
+          </a:prstGeom>
+          <a:noFill/>
+        </p:spPr>
+        <p:txBody>
+          <a:bodyPr wrap="square">
+            <a:spAutoFit/>
+          </a:bodyPr>
+          <a:lstStyle/>
+          <a:p>
+            <a:r>
+              <a:rPr sz="2600" b="1">
+                <a:solidFill>
+                  <a:srgbClr val="0B3D2E"/>
+                </a:solidFill>
+              </a:rPr>
+              <a:t>❓ Preguntas frecuentes</a:t>
+            </a:r>
+          </a:p>
+        </p:txBody>
+      </p:sp>
+      <p:sp>
+        <p:nvSpPr>
+          <p:cNvPr id="3" name="TextBox 2"/>
+          <p:cNvSpPr txBox="1"/>
+          <p:nvPr/>
+        </p:nvSpPr>
+        <p:spPr>
+          <a:xfrm>
+            <a:off x="457200" y="1280160"/>
+            <a:ext cx="8229600" cy="4937760"/>
+          </a:xfrm>
+          <a:prstGeom prst="rect">
+            <a:avLst/>
+          </a:prstGeom>
+          <a:noFill/>
+        </p:spPr>
+        <p:txBody>
+          <a:bodyPr wrap="square">
+            <a:spAutoFit/>
+          </a:bodyPr>
+          <a:lstStyle/>
+          <a:p>
+            <a:pPr>
+              <a:spcAft>
+                <a:spcPts val="600"/>
+              </a:spcAft>
+            </a:pPr>
+            <a:r>
+              <a:rPr sz="1500">
+                <a:solidFill>
+                  <a:srgbClr val="22282E"/>
+                </a:solidFill>
+              </a:rPr>
+              <a:t>•  ❓ ¿Qué log activo primero si solo puedo activar uno?</a:t>
+            </a:r>
+          </a:p>
+          <a:p>
+            <a:pPr>
+              <a:spcAft>
+                <a:spcPts val="600"/>
+              </a:spcAft>
+            </a:pPr>
+            <a:r>
+              <a:rPr sz="1500">
+                <a:solidFill>
+                  <a:srgbClr val="22282E"/>
+                </a:solidFill>
+              </a:rPr>
+              <a:t>•  El del plano de gestión (CloudTrail / Activity Log / Cloud Audit Logs). Registra el "quién hizo qué" a nivel de API y es la fuente más valiosa tanto para detección como para forense.</a:t>
+            </a:r>
+          </a:p>
+          <a:p>
+            <a:pPr>
+              <a:spcAft>
+                <a:spcPts val="600"/>
+              </a:spcAft>
+            </a:pPr>
+            <a:r>
+              <a:rPr sz="1500">
+                <a:solidFill>
+                  <a:srgbClr val="22282E"/>
+                </a:solidFill>
+              </a:rPr>
+              <a:t>•  ❓ ¿Por qué guardar los logs en una cuenta separada e inmutable?</a:t>
+            </a:r>
+          </a:p>
+          <a:p>
+            <a:pPr>
+              <a:spcAft>
+                <a:spcPts val="600"/>
+              </a:spcAft>
+            </a:pPr>
+            <a:r>
+              <a:rPr sz="1500">
+                <a:solidFill>
+                  <a:srgbClr val="22282E"/>
+                </a:solidFill>
+              </a:rPr>
+              <a:t>•  Porque un atacante con acceso a la cuenta intentará borrar los rastros. Enviar los logs a una cuenta de logging aparte, append-only y con retención, preserva la evidencia aunque la cuenta original se…</a:t>
+            </a:r>
+          </a:p>
+          <a:p>
+            <a:pPr>
+              <a:spcAft>
+                <a:spcPts val="600"/>
+              </a:spcAft>
+            </a:pPr>
+            <a:r>
+              <a:rPr sz="1500">
+                <a:solidFill>
+                  <a:srgbClr val="22282E"/>
+                </a:solidFill>
+              </a:rPr>
+              <a:t>•  ❓ ¿Los data events valen la pena si cuestan más?</a:t>
+            </a:r>
+          </a:p>
+          <a:p>
+            <a:pPr>
+              <a:spcAft>
+                <a:spcPts val="600"/>
+              </a:spcAft>
+            </a:pPr>
+            <a:r>
+              <a:rPr sz="1500">
+                <a:solidFill>
+                  <a:srgbClr val="22282E"/>
+                </a:solidFill>
+              </a:rPr>
+              <a:t>•  En recursos críticos suelen ser necesarios para observar operaciones por objeto, pero se complementan con identidad, red, aplicación y destino. Actívalos selectivamente según riesgo, volumen, costo y…</a:t>
+            </a:r>
+          </a:p>
+        </p:txBody>
+      </p:sp>
+    </p:spTree>
+  </p:cSld>
+  <p:clrMapOvr>
+    <a:masterClrMapping/>
+  </p:clrMapOvr>
+</p:sld>
+</file>
+
+<file path=ppt/slides/slide15.xml><?xml version="1.0" encoding="utf-8"?>
+<p:sld xmlns:a="http://schemas.openxmlformats.org/drawingml/2006/main" xmlns:p="http://schemas.openxmlformats.org/presentationml/2006/main" xmlns:r="http://schemas.openxmlformats.org/officeDocument/2006/relationships">
+  <p:cSld>
+    <p:spTree>
+      <p:nvGrpSpPr>
+        <p:cNvPr id="1" name=""/>
+        <p:cNvGrpSpPr/>
+        <p:nvPr/>
+      </p:nvGrpSpPr>
+      <p:grpSpPr/>
+      <p:sp>
+        <p:nvSpPr>
+          <p:cNvPr id="2" name="TextBox 1"/>
+          <p:cNvSpPr txBox="1"/>
+          <p:nvPr/>
+        </p:nvSpPr>
+        <p:spPr>
+          <a:xfrm>
+            <a:off x="457200" y="320040"/>
+            <a:ext cx="8229600" cy="822960"/>
+          </a:xfrm>
+          <a:prstGeom prst="rect">
+            <a:avLst/>
+          </a:prstGeom>
+          <a:noFill/>
+        </p:spPr>
+        <p:txBody>
+          <a:bodyPr wrap="square">
+            <a:spAutoFit/>
+          </a:bodyPr>
+          <a:lstStyle/>
+          <a:p>
+            <a:r>
+              <a:rPr sz="2600" b="1">
+                <a:solidFill>
+                  <a:srgbClr val="0B3D2E"/>
+                </a:solidFill>
+              </a:rPr>
+              <a:t>🔗 Referencias verificables y alcance</a:t>
+            </a:r>
+          </a:p>
+        </p:txBody>
+      </p:sp>
+      <p:sp>
+        <p:nvSpPr>
+          <p:cNvPr id="3" name="TextBox 2"/>
+          <p:cNvSpPr txBox="1"/>
+          <p:nvPr/>
+        </p:nvSpPr>
+        <p:spPr>
+          <a:xfrm>
+            <a:off x="457200" y="1280160"/>
+            <a:ext cx="8229600" cy="4937760"/>
+          </a:xfrm>
+          <a:prstGeom prst="rect">
+            <a:avLst/>
+          </a:prstGeom>
+          <a:noFill/>
+        </p:spPr>
+        <p:txBody>
+          <a:bodyPr wrap="square">
+            <a:spAutoFit/>
+          </a:bodyPr>
+          <a:lstStyle/>
+          <a:p>
+            <a:pPr>
+              <a:spcAft>
+                <a:spcPts val="600"/>
+              </a:spcAft>
+            </a:pPr>
+            <a:r>
+              <a:rPr sz="1500">
+                <a:solidFill>
+                  <a:srgbClr val="22282E"/>
+                </a:solidFill>
+              </a:rPr>
+              <a:t>•  AWS CloudTrail. &lt;https://docs.aws.amazon.com/awscloudtrail/latest/userguide/&gt; — categorías, trails y event data stores oficiales.</a:t>
+            </a:r>
+          </a:p>
+          <a:p>
+            <a:pPr>
+              <a:spcAft>
+                <a:spcPts val="600"/>
+              </a:spcAft>
+            </a:pPr>
+            <a:r>
+              <a:rPr sz="1500">
+                <a:solidFill>
+                  <a:srgbClr val="22282E"/>
+                </a:solidFill>
+              </a:rPr>
+              <a:t>•  Azure Activity Log. &lt;https://learn.microsoft.com/en-us/azure/azure-monitor/platform/activity-log&gt; — alcance oficial del control plane y exportación.</a:t>
+            </a:r>
+          </a:p>
+          <a:p>
+            <a:pPr>
+              <a:spcAft>
+                <a:spcPts val="600"/>
+              </a:spcAft>
+            </a:pPr>
+            <a:r>
+              <a:rPr sz="1500">
+                <a:solidFill>
+                  <a:srgbClr val="22282E"/>
+                </a:solidFill>
+              </a:rPr>
+              <a:t>•  Google Cloud Audit Logs. &lt;https://docs.cloud.google.com/logging/docs/audit/understanding-audit-logs&gt; — categorías, identidades y configuración oficial.</a:t>
+            </a:r>
+          </a:p>
+          <a:p>
+            <a:pPr>
+              <a:spcAft>
+                <a:spcPts val="600"/>
+              </a:spcAft>
+            </a:pPr>
+            <a:r>
+              <a:rPr sz="1500">
+                <a:solidFill>
+                  <a:srgbClr val="22282E"/>
+                </a:solidFill>
+              </a:rPr>
+              <a:t>•  MITRE ATT&amp;CK Cloud Matrix. &lt;https://attack.mitre.org/matrices/enterprise/cloud/&gt; — cobertura conductual para hipótesis; no reemplaza semántica del proveedor.</a:t>
+            </a:r>
+          </a:p>
+          <a:p>
+            <a:pPr>
+              <a:spcAft>
+                <a:spcPts val="600"/>
+              </a:spcAft>
+            </a:pPr>
+            <a:r>
+              <a:rPr sz="1500">
+                <a:solidFill>
+                  <a:srgbClr val="22282E"/>
+                </a:solidFill>
+              </a:rPr>
+              <a:t>•  Sigma. &lt;https://github.com/SigmaHQ/sigma&gt; — formato abierto para lógica portable; cada backend y fuente requiere validación.</a:t>
+            </a:r>
+          </a:p>
+        </p:txBody>
+      </p:sp>
+    </p:spTree>
+  </p:cSld>
+  <p:clrMapOvr>
+    <a:masterClrMapping/>
+  </p:clrMapOvr>
+</p:sld>
+</file>
+
+<file path=ppt/slides/slide16.xml><?xml version="1.0" encoding="utf-8"?>
+<p:sld xmlns:a="http://schemas.openxmlformats.org/drawingml/2006/main" xmlns:p="http://schemas.openxmlformats.org/presentationml/2006/main" xmlns:r="http://schemas.openxmlformats.org/officeDocument/2006/relationships">
+  <p:cSld>
+    <p:spTree>
+      <p:nvGrpSpPr>
+        <p:cNvPr id="1" name=""/>
+        <p:cNvGrpSpPr/>
+        <p:nvPr/>
+      </p:nvGrpSpPr>
+      <p:grpSpPr/>
+      <p:sp>
+        <p:nvSpPr>
+          <p:cNvPr id="2" name="TextBox 1"/>
+          <p:cNvSpPr txBox="1"/>
+          <p:nvPr/>
+        </p:nvSpPr>
+        <p:spPr>
+          <a:xfrm>
+            <a:off x="457200" y="274320"/>
+            <a:ext cx="8229600" cy="640080"/>
+          </a:xfrm>
+          <a:prstGeom prst="rect">
+            <a:avLst/>
+          </a:prstGeom>
+          <a:noFill/>
+        </p:spPr>
+        <p:txBody>
+          <a:bodyPr wrap="square">
+            <a:spAutoFit/>
+          </a:bodyPr>
+          <a:lstStyle/>
+          <a:p>
+            <a:r>
+              <a:rPr sz="2200" b="1">
+                <a:solidFill>
+                  <a:srgbClr val="0B3D2E"/>
+                </a:solidFill>
+              </a:rPr>
+              <a:t>Diagrama de la clase</a:t>
+            </a:r>
+          </a:p>
+        </p:txBody>
+      </p:sp>
+      <p:pic>
+        <p:nvPicPr>
+          <p:cNvPr id="3" name="Picture 2" descr="6e614e7e46f6b35e.png"/>
+          <p:cNvPicPr>
+            <a:picLocks noChangeAspect="1"/>
+          </p:cNvPicPr>
+          <p:nvPr/>
+        </p:nvPicPr>
+        <p:blipFill>
+          <a:blip r:embed="rId2"/>
+          <a:stretch>
+            <a:fillRect/>
+          </a:stretch>
+        </p:blipFill>
+        <p:spPr>
+          <a:xfrm>
+            <a:off x="457200" y="2574036"/>
+            <a:ext cx="8229600" cy="2350008"/>
+          </a:xfrm>
+          <a:prstGeom prst="rect">
+            <a:avLst/>
+          </a:prstGeom>
+        </p:spPr>
+      </p:pic>
     </p:spTree>
   </p:cSld>
   <p:clrMapOvr>
@@ -4041,7 +4612,7 @@
                   <a:srgbClr val="22282E"/>
                 </a:solidFill>
               </a:rPr>
-              <a:t>•  4 — Centralización inmutable</a:t>
+              <a:t>•  4 — Centralización y protección de retención</a:t>
             </a:r>
           </a:p>
           <a:p>
@@ -4137,7 +4708,7 @@
                   <a:srgbClr val="0B3D2E"/>
                 </a:solidFill>
               </a:rPr>
-              <a:t>📖 Definiciones y características</a:t>
+              <a:t>🧠 Explicación en profundidad</a:t>
             </a:r>
           </a:p>
         </p:txBody>
@@ -4175,97 +4746,82 @@
                   <a:srgbClr val="22282E"/>
                 </a:solidFill>
               </a:rPr>
-              <a:t>•  Log del plano de gestión: registra llamadas a la API (CloudTrail, Activity Log, Cloud Audit Logs). Clave: la fuente forense número uno en la nube.</a:t>
-            </a:r>
-          </a:p>
-          <a:p>
-            <a:pPr>
-              <a:spcAft>
-                <a:spcPts val="600"/>
-              </a:spcAft>
-            </a:pPr>
-            <a:r>
-              <a:rPr sz="1500">
-                <a:solidFill>
-                  <a:srgbClr val="22282E"/>
-                </a:solidFill>
-              </a:rPr>
-              <a:t>•  Flow logs: metadatos de conexiones de red. Clave: detectan movimiento lateral y exfiltración.</a:t>
-            </a:r>
-          </a:p>
-          <a:p>
-            <a:pPr>
-              <a:spcAft>
-                <a:spcPts val="600"/>
-              </a:spcAft>
-            </a:pPr>
-            <a:r>
-              <a:rPr sz="1500">
-                <a:solidFill>
-                  <a:srgbClr val="22282E"/>
-                </a:solidFill>
-              </a:rPr>
-              <a:t>•  Data events: acceso a datos (p. ej. GetObject de S3). Clave: costosos pero clave para detectar exfiltración de datos.</a:t>
-            </a:r>
-          </a:p>
-          <a:p>
-            <a:pPr>
-              <a:spcAft>
-                <a:spcPts val="600"/>
-              </a:spcAft>
-            </a:pPr>
-            <a:r>
-              <a:rPr sz="1500">
-                <a:solidFill>
-                  <a:srgbClr val="22282E"/>
-                </a:solidFill>
-              </a:rPr>
-              <a:t>•  Log inmutable: almacenamiento append-only, protegido contra borrado. Clave: preserva la evidencia frente a un atacante con acceso.</a:t>
-            </a:r>
-          </a:p>
-          <a:p>
-            <a:pPr>
-              <a:spcAft>
-                <a:spcPts val="600"/>
-              </a:spcAft>
-            </a:pPr>
-            <a:r>
-              <a:rPr sz="1500">
-                <a:solidFill>
-                  <a:srgbClr val="22282E"/>
-                </a:solidFill>
-              </a:rPr>
-              <a:t>•  Detección: regla que convierte patrones de log en alerta. Clave: debe mapearse a técnicas de ATT&amp;CK.</a:t>
-            </a:r>
-          </a:p>
-          <a:p>
-            <a:pPr>
-              <a:spcAft>
-                <a:spcPts val="600"/>
-              </a:spcAft>
-            </a:pPr>
-            <a:r>
-              <a:rPr sz="1500">
-                <a:solidFill>
-                  <a:srgbClr val="22282E"/>
-                </a:solidFill>
-              </a:rPr>
-              <a:t>•  SIEM: plataforma de correlación y alerta (Sentinel, Security Lake+OpenSearch, Chronicle). Clave: une múltiples fuentes.</a:t>
-            </a:r>
-          </a:p>
-          <a:p>
-            <a:pPr>
-              <a:spcAft>
-                <a:spcPts val="600"/>
-              </a:spcAft>
-            </a:pPr>
-            <a:r>
-              <a:rPr sz="1500">
-                <a:solidFill>
-                  <a:srgbClr val="22282E"/>
-                </a:solidFill>
-              </a:rPr>
-              <a:t>•  Punto ciego: actividad sin registro. Clave: regiones o cuentas sin logging son terreno libre para el atacante.</a:t>
+              <a:t>•  Una estrategia de logging parte de preguntas: quién cambió configuración, quién accedió a datos, qué identidad obtuvo sesión, qué cargas se comunicaron y qué ocurrió dentro de la aplicación. Cada…</a:t>
+            </a:r>
+          </a:p>
+          <a:p>
+            <a:pPr>
+              <a:spcAft>
+                <a:spcPts val="600"/>
+              </a:spcAft>
+            </a:pPr>
+            <a:r>
+              <a:rPr sz="1500">
+                <a:solidFill>
+                  <a:srgbClr val="22282E"/>
+                </a:solidFill>
+              </a:rPr>
+              <a:t>•  El diagrama evita diseñar desde la herramienta SIEM. Primero se seleccionan fuentes y se conserva procedencia; luego se normaliza y detecta. Si el log de data plane no estaba habilitado, una regla…</a:t>
+            </a:r>
+          </a:p>
+          <a:p>
+            <a:pPr>
+              <a:spcAft>
+                <a:spcPts val="600"/>
+              </a:spcAft>
+            </a:pPr>
+            <a:r>
+              <a:rPr sz="1500">
+                <a:solidFill>
+                  <a:srgbClr val="22282E"/>
+                </a:solidFill>
+              </a:rPr>
+              <a:t>•  CloudTrail, Azure Activity Log y Cloud Audit Logs registran planos y categorías diferentes. Activity Log se centra en control plane de recursos; Entra aporta identidad; resource logs deben…</a:t>
+            </a:r>
+          </a:p>
+          <a:p>
+            <a:pPr>
+              <a:spcAft>
+                <a:spcPts val="600"/>
+              </a:spcAft>
+            </a:pPr>
+            <a:r>
+              <a:rPr sz="1500">
+                <a:solidFill>
+                  <a:srgbClr val="22282E"/>
+                </a:solidFill>
+              </a:rPr>
+              <a:t>•  Flow logs resumen tráfico observado en interfaces o redes y pueden omitir contenido, paquetes o campos según configuración. DNS logs muestran consultas en puntos concretos. Ninguno identifica…</a:t>
+            </a:r>
+          </a:p>
+          <a:p>
+            <a:pPr>
+              <a:spcAft>
+                <a:spcPts val="600"/>
+              </a:spcAft>
+            </a:pPr>
+            <a:r>
+              <a:rPr sz="1500">
+                <a:solidFill>
+                  <a:srgbClr val="22282E"/>
+                </a:solidFill>
+              </a:rPr>
+              <a:t>•  El destino usa cuenta/proyecto/suscripción de logging separada, acceso mínimo, retención y mecanismos de bloqueo disponibles. Inmutabilidad es una propiedad configurada con duración y autoridad; no…</a:t>
+            </a:r>
+          </a:p>
+          <a:p>
+            <a:pPr>
+              <a:spcAft>
+                <a:spcPts val="600"/>
+              </a:spcAft>
+            </a:pPr>
+            <a:r>
+              <a:rPr sz="1500">
+                <a:solidFill>
+                  <a:srgbClr val="22282E"/>
+                </a:solidFill>
+              </a:rPr>
+              <a:t>•  Una regla contiene hipótesis, fuentes requeridas, lógica, severidad, entidades, excepciones, respuesta y prueba. Crear access keys, deshabilitar logging o cambiar una policy pueden ser administración…</a:t>
             </a:r>
           </a:p>
         </p:txBody>
@@ -4316,7 +4872,7 @@
                   <a:srgbClr val="0B3D2E"/>
                 </a:solidFill>
               </a:rPr>
-              <a:t>🧰 Herramientas y preparación</a:t>
+              <a:t>📖 Definiciones y características</a:t>
             </a:r>
           </a:p>
         </p:txBody>
@@ -4354,82 +4910,97 @@
                   <a:srgbClr val="22282E"/>
                 </a:solidFill>
               </a:rPr>
-              <a:t>•  Logging del proveedor activado: CloudTrail (multi-región), VPC Flow Logs, Azure Monitor/Activity Log, Google Cloud Audit Logs.</a:t>
-            </a:r>
-          </a:p>
-          <a:p>
-            <a:pPr>
-              <a:spcAft>
-                <a:spcPts val="600"/>
-              </a:spcAft>
-            </a:pPr>
-            <a:r>
-              <a:rPr sz="1500">
-                <a:solidFill>
-                  <a:srgbClr val="22282E"/>
-                </a:solidFill>
-              </a:rPr>
-              <a:t>•  Un destino centralizado (bucket dedicado + SIEM); Sigma para escribir reglas portables.</a:t>
-            </a:r>
-          </a:p>
-          <a:p>
-            <a:pPr>
-              <a:spcAft>
-                <a:spcPts val="600"/>
-              </a:spcAft>
-            </a:pPr>
-            <a:r>
-              <a:rPr sz="1500">
-                <a:solidFill>
-                  <a:srgbClr val="22282E"/>
-                </a:solidFill>
-              </a:rPr>
-              <a:t>•  Opcional: Athena/Log Analytics/BigQuery para consultar logs.</a:t>
-            </a:r>
-          </a:p>
-          <a:p>
-            <a:pPr>
-              <a:spcAft>
-                <a:spcPts val="600"/>
-              </a:spcAft>
-            </a:pPr>
-            <a:r>
-              <a:rPr sz="1500">
-                <a:solidFill>
-                  <a:srgbClr val="22282E"/>
-                </a:solidFill>
-              </a:rPr>
-              <a:t>•  aws cloudtrail lookup-events \</a:t>
-            </a:r>
-          </a:p>
-          <a:p>
-            <a:pPr>
-              <a:spcAft>
-                <a:spcPts val="600"/>
-              </a:spcAft>
-            </a:pPr>
-            <a:r>
-              <a:rPr sz="1500">
-                <a:solidFill>
-                  <a:srgbClr val="22282E"/>
-                </a:solidFill>
-              </a:rPr>
-              <a:t>•  --lookup-attributes AttributeKey=EventName,AttributeValue=CreateAccessKey</a:t>
-            </a:r>
-          </a:p>
-          <a:p>
-            <a:pPr>
-              <a:spcAft>
-                <a:spcPts val="600"/>
-              </a:spcAft>
-            </a:pPr>
-            <a:r>
-              <a:rPr sz="1500">
-                <a:solidFill>
-                  <a:srgbClr val="22282E"/>
-                </a:solidFill>
-              </a:rPr>
-              <a:t>•  gcloud logging read 'protoPayload.authenticationInfo.principalEmail="user@dom.com"' --limit 20</a:t>
+              <a:t>•  Log del plano de gestión: registra actividades administrativas cubiertas por el proveedor. Clave: es esencial para cambios API, pero se complementa con identidad, datos, red y carga.</a:t>
+            </a:r>
+          </a:p>
+          <a:p>
+            <a:pPr>
+              <a:spcAft>
+                <a:spcPts val="600"/>
+              </a:spcAft>
+            </a:pPr>
+            <a:r>
+              <a:rPr sz="1500">
+                <a:solidFill>
+                  <a:srgbClr val="22282E"/>
+                </a:solidFill>
+              </a:rPr>
+              <a:t>•  Flow logs: metadatos de conexiones de red. Clave: detectan movimiento lateral y exfiltración.</a:t>
+            </a:r>
+          </a:p>
+          <a:p>
+            <a:pPr>
+              <a:spcAft>
+                <a:spcPts val="600"/>
+              </a:spcAft>
+            </a:pPr>
+            <a:r>
+              <a:rPr sz="1500">
+                <a:solidFill>
+                  <a:srgbClr val="22282E"/>
+                </a:solidFill>
+              </a:rPr>
+              <a:t>•  Data events: acceso a datos (p. ej. GetObject de S3). Clave: costosos pero clave para detectar exfiltración de datos.</a:t>
+            </a:r>
+          </a:p>
+          <a:p>
+            <a:pPr>
+              <a:spcAft>
+                <a:spcPts val="600"/>
+              </a:spcAft>
+            </a:pPr>
+            <a:r>
+              <a:rPr sz="1500">
+                <a:solidFill>
+                  <a:srgbClr val="22282E"/>
+                </a:solidFill>
+              </a:rPr>
+              <a:t>•  Log protegido por retención: almacenamiento con controles de escritura, borrado y tiempo. Clave: su resistencia depende de configuración, autoridad y separación del dominio comprometido.</a:t>
+            </a:r>
+          </a:p>
+          <a:p>
+            <a:pPr>
+              <a:spcAft>
+                <a:spcPts val="600"/>
+              </a:spcAft>
+            </a:pPr>
+            <a:r>
+              <a:rPr sz="1500">
+                <a:solidFill>
+                  <a:srgbClr val="22282E"/>
+                </a:solidFill>
+              </a:rPr>
+              <a:t>•  Detección: regla que convierte patrones de log en alerta. Clave: debe mapearse a técnicas de ATT&amp;CK.</a:t>
+            </a:r>
+          </a:p>
+          <a:p>
+            <a:pPr>
+              <a:spcAft>
+                <a:spcPts val="600"/>
+              </a:spcAft>
+            </a:pPr>
+            <a:r>
+              <a:rPr sz="1500">
+                <a:solidFill>
+                  <a:srgbClr val="22282E"/>
+                </a:solidFill>
+              </a:rPr>
+              <a:t>•  SIEM: plataforma de correlación y alerta (Sentinel, Security Lake+OpenSearch, Chronicle). Clave: une múltiples fuentes.</a:t>
+            </a:r>
+          </a:p>
+          <a:p>
+            <a:pPr>
+              <a:spcAft>
+                <a:spcPts val="600"/>
+              </a:spcAft>
+            </a:pPr>
+            <a:r>
+              <a:rPr sz="1500">
+                <a:solidFill>
+                  <a:srgbClr val="22282E"/>
+                </a:solidFill>
+              </a:rPr>
+              <a:t>•  Punto ciego: actividad no observable por generación, cobertura, retención o acceso. Clave: se registra como limitación y se prioriza según riesgo.</a:t>
             </a:r>
           </a:p>
         </p:txBody>
@@ -4480,7 +5051,7 @@
                   <a:srgbClr val="0B3D2E"/>
                 </a:solidFill>
               </a:rPr>
-              <a:t>🧪 Laboratorio guiado</a:t>
+              <a:t>🔍 Caso razonado — creación legítima o persistencia IAM</a:t>
             </a:r>
           </a:p>
         </p:txBody>
@@ -4518,97 +5089,22 @@
                   <a:srgbClr val="22282E"/>
                 </a:solidFill>
               </a:rPr>
-              <a:t>•  Verifica que el logging del plano de gestión está activo multi-región y que su bucket/almacén es inmutable (object lock / retención).</a:t>
-            </a:r>
-          </a:p>
-          <a:p>
-            <a:pPr>
-              <a:spcAft>
-                <a:spcPts val="600"/>
-              </a:spcAft>
-            </a:pPr>
-            <a:r>
-              <a:rPr sz="1500">
-                <a:solidFill>
-                  <a:srgbClr val="22282E"/>
-                </a:solidFill>
-              </a:rPr>
-              <a:t>•  Genera actividad en tu cuenta de laboratorio (crea una clave de acceso, abre un security group, sube un objeto) para producir eventos.</a:t>
-            </a:r>
-          </a:p>
-          <a:p>
-            <a:pPr>
-              <a:spcAft>
-                <a:spcPts val="600"/>
-              </a:spcAft>
-            </a:pPr>
-            <a:r>
-              <a:rPr sz="1500">
-                <a:solidFill>
-                  <a:srgbClr val="22282E"/>
-                </a:solidFill>
-              </a:rPr>
-              <a:t>•  Escribe consultas para detectar: (a) creación de claves de acceso IAM, (b) intento de deshabilitar CloudTrail/logging, (c) PutBucketPolicy que abre un bucket.</a:t>
-            </a:r>
-          </a:p>
-          <a:p>
-            <a:pPr>
-              <a:spcAft>
-                <a:spcPts val="600"/>
-              </a:spcAft>
-            </a:pPr>
-            <a:r>
-              <a:rPr sz="1500">
-                <a:solidFill>
-                  <a:srgbClr val="22282E"/>
-                </a:solidFill>
-              </a:rPr>
-              <a:t>•  Traduce esas detecciones a reglas Sigma y mapéalas a técnicas de MITRE ATT&amp;CK for Cloud (Defense Evasion: Impair Defenses; Persistence: Create Account/Access Key).</a:t>
-            </a:r>
-          </a:p>
-          <a:p>
-            <a:pPr>
-              <a:spcAft>
-                <a:spcPts val="600"/>
-              </a:spcAft>
-            </a:pPr>
-            <a:r>
-              <a:rPr sz="1500">
-                <a:solidFill>
-                  <a:srgbClr val="22282E"/>
-                </a:solidFill>
-              </a:rPr>
-              <a:t>•  Integra los logs en un SIEM (Sentinel/Security Lake/Chronicle) y crea una alerta que dispare al deshabilitar el logging.</a:t>
-            </a:r>
-          </a:p>
-          <a:p>
-            <a:pPr>
-              <a:spcAft>
-                <a:spcPts val="600"/>
-              </a:spcAft>
-            </a:pPr>
-            <a:r>
-              <a:rPr sz="1500">
-                <a:solidFill>
-                  <a:srgbClr val="22282E"/>
-                </a:solidFill>
-              </a:rPr>
-              <a:t>•  Simula un punto ciego: crea un recurso en una región sin logging y comprueba que no aparece; corrige activando cobertura global.</a:t>
-            </a:r>
-          </a:p>
-          <a:p>
-            <a:pPr>
-              <a:spcAft>
-                <a:spcPts val="600"/>
-              </a:spcAft>
-            </a:pPr>
-            <a:r>
-              <a:rPr sz="1500">
-                <a:solidFill>
-                  <a:srgbClr val="22282E"/>
-                </a:solidFill>
-              </a:rPr>
-              <a:t>•  Documenta la latencia entre la acción y la alerta, y ajusta la retención según requisitos de cumplimiento.</a:t>
+              <a:t>•  Una regla alerta por CreateAccessKey. El evento pertenece a un administrador durante una ventana aprobada, pero la clave fue creada para otro usuario y se usó minutos después desde una región no…</a:t>
+            </a:r>
+          </a:p>
+          <a:p>
+            <a:pPr>
+              <a:spcAft>
+                <a:spcPts val="600"/>
+              </a:spcAft>
+            </a:pPr>
+            <a:r>
+              <a:rPr sz="1500">
+                <a:solidFill>
+                  <a:srgbClr val="22282E"/>
+                </a:solidFill>
+              </a:rPr>
+              <a:t>•  La prueba sintética crea una clave de laboratorio, confirma alerta, entidades y latencia, y la revoca. También ejecuta un caso autorizado esperado para comprobar que la excepción no oculta usos fuera…</a:t>
             </a:r>
           </a:p>
         </p:txBody>
@@ -4659,7 +5155,7 @@
                   <a:srgbClr val="0B3D2E"/>
                 </a:solidFill>
               </a:rPr>
-              <a:t>✍️ Ejercicios</a:t>
+              <a:t>✅ Criterio de dominio</a:t>
             </a:r>
           </a:p>
         </p:txBody>
@@ -4697,82 +5193,7 @@
                   <a:srgbClr val="22282E"/>
                 </a:solidFill>
               </a:rPr>
-              <a:t>•  Escribe una regla que alerte cuando se deshabilita el logging del plano de gestión.</a:t>
-            </a:r>
-          </a:p>
-          <a:p>
-            <a:pPr>
-              <a:spcAft>
-                <a:spcPts val="600"/>
-              </a:spcAft>
-            </a:pPr>
-            <a:r>
-              <a:rPr sz="1500">
-                <a:solidFill>
-                  <a:srgbClr val="22282E"/>
-                </a:solidFill>
-              </a:rPr>
-              <a:t>•  Detecta un pico anómalo de GetObject (posible exfiltración) usando data events.</a:t>
-            </a:r>
-          </a:p>
-          <a:p>
-            <a:pPr>
-              <a:spcAft>
-                <a:spcPts val="600"/>
-              </a:spcAft>
-            </a:pPr>
-            <a:r>
-              <a:rPr sz="1500">
-                <a:solidFill>
-                  <a:srgbClr val="22282E"/>
-                </a:solidFill>
-              </a:rPr>
-              <a:t>•  Crea una regla Sigma para el uso de credenciales desde una geolocalización inusual.</a:t>
-            </a:r>
-          </a:p>
-          <a:p>
-            <a:pPr>
-              <a:spcAft>
-                <a:spcPts val="600"/>
-              </a:spcAft>
-            </a:pPr>
-            <a:r>
-              <a:rPr sz="1500">
-                <a:solidFill>
-                  <a:srgbClr val="22282E"/>
-                </a:solidFill>
-              </a:rPr>
-              <a:t>•  Diseña un esquema de centralización de logs multi-cuenta inmutable.</a:t>
-            </a:r>
-          </a:p>
-          <a:p>
-            <a:pPr>
-              <a:spcAft>
-                <a:spcPts val="600"/>
-              </a:spcAft>
-            </a:pPr>
-            <a:r>
-              <a:rPr sz="1500">
-                <a:solidFill>
-                  <a:srgbClr val="22282E"/>
-                </a:solidFill>
-              </a:rPr>
-              <a:t>•  Consulta Flow Logs para identificar una conexión saliente sospechosa.</a:t>
-            </a:r>
-          </a:p>
-          <a:p>
-            <a:pPr>
-              <a:spcAft>
-                <a:spcPts val="600"/>
-              </a:spcAft>
-            </a:pPr>
-            <a:r>
-              <a:rPr sz="1500">
-                <a:solidFill>
-                  <a:srgbClr val="22282E"/>
-                </a:solidFill>
-              </a:rPr>
-              <a:t>•  Define la política de retención de logs para un requisito de 1 año.</a:t>
+              <a:t>•  Dominas la clase cuando construyes una matriz pregunta–fuente–cobertura–retención–costo, diferencias planos por proveedor, diseñas almacenamiento fuera del dominio de ataque y pruebas una detección…</a:t>
             </a:r>
           </a:p>
         </p:txBody>
@@ -4823,7 +5244,7 @@
                   <a:srgbClr val="0B3D2E"/>
                 </a:solidFill>
               </a:rPr>
-              <a:t>📝 Reto verificable</a:t>
+              <a:t>🧰 Herramientas y preparación</a:t>
             </a:r>
           </a:p>
         </p:txBody>
@@ -4861,67 +5282,37 @@
                   <a:srgbClr val="22282E"/>
                 </a:solidFill>
               </a:rPr>
-              <a:t>•  Configura la capa de visibilidad de una cuenta de laboratorio y demuestra una detección de extremo a</a:t>
-            </a:r>
-          </a:p>
-          <a:p>
-            <a:pPr>
-              <a:spcAft>
-                <a:spcPts val="600"/>
-              </a:spcAft>
-            </a:pPr>
-            <a:r>
-              <a:rPr sz="1500">
-                <a:solidFill>
-                  <a:srgbClr val="22282E"/>
-                </a:solidFill>
-              </a:rPr>
-              <a:t>•  extremo: una acción maliciosa simulada genera un evento que dispara una alerta en el SIEM.</a:t>
-            </a:r>
-          </a:p>
-          <a:p>
-            <a:pPr>
-              <a:spcAft>
-                <a:spcPts val="600"/>
-              </a:spcAft>
-            </a:pPr>
-            <a:r>
-              <a:rPr sz="1500">
-                <a:solidFill>
-                  <a:srgbClr val="22282E"/>
-                </a:solidFill>
-              </a:rPr>
-              <a:t>•  Criterio de aceptación: el logging del plano de gestión está activo multi-región y en almacén</a:t>
-            </a:r>
-          </a:p>
-          <a:p>
-            <a:pPr>
-              <a:spcAft>
-                <a:spcPts val="600"/>
-              </a:spcAft>
-            </a:pPr>
-            <a:r>
-              <a:rPr sz="1500">
-                <a:solidFill>
-                  <a:srgbClr val="22282E"/>
-                </a:solidFill>
-              </a:rPr>
-              <a:t>•  inmutable; al ejecutar la acción simulada (p. ej. crear una clave de acceso o intentar deshabilitar el</a:t>
-            </a:r>
-          </a:p>
-          <a:p>
-            <a:pPr>
-              <a:spcAft>
-                <a:spcPts val="600"/>
-              </a:spcAft>
-            </a:pPr>
-            <a:r>
-              <a:rPr sz="1500">
-                <a:solidFill>
-                  <a:srgbClr val="22282E"/>
-                </a:solidFill>
-              </a:rPr>
-              <a:t>•  logging) se genera una alerta trazable en el SIEM, con la técnica ATT&amp;CK asociada documentada.</a:t>
+              <a:t>•  Logging del proveedor activado: CloudTrail (multi-región), VPC Flow Logs, Azure Monitor/Activity Log, Google Cloud Audit Logs.</a:t>
+            </a:r>
+          </a:p>
+          <a:p>
+            <a:pPr>
+              <a:spcAft>
+                <a:spcPts val="600"/>
+              </a:spcAft>
+            </a:pPr>
+            <a:r>
+              <a:rPr sz="1500">
+                <a:solidFill>
+                  <a:srgbClr val="22282E"/>
+                </a:solidFill>
+              </a:rPr>
+              <a:t>•  Un destino centralizado (bucket dedicado + SIEM); Sigma para escribir reglas portables.</a:t>
+            </a:r>
+          </a:p>
+          <a:p>
+            <a:pPr>
+              <a:spcAft>
+                <a:spcPts val="600"/>
+              </a:spcAft>
+            </a:pPr>
+            <a:r>
+              <a:rPr sz="1500">
+                <a:solidFill>
+                  <a:srgbClr val="22282E"/>
+                </a:solidFill>
+              </a:rPr>
+              <a:t>•  Opcional: Athena/Log Analytics/BigQuery para consultar logs.</a:t>
             </a:r>
           </a:p>
         </p:txBody>
